--- a/2-seances/S10-la-boucle/a-projeter/seance-10-projection.pptx
+++ b/2-seances/S10-la-boucle/a-projeter/seance-10-projection.pptx
@@ -6284,7 +6284,7 @@
                 <a:ea typeface="Calibri" pitchFamily="34" charset="-122"/>
                 <a:cs typeface="Calibri" pitchFamily="34" charset="-120"/>
               </a:rPr>
-              <a:t>Celui d'aujourd'hui est plus court, et il fait quatre fois plus.</a:t>
+              <a:t>Celui d'aujourd'hui est plus court — et il joue neuf tours au lieu de deux.</a:t>
             </a:r>
             <a:endParaRPr lang="en-US" sz="1900" dirty="0"/>
           </a:p>
